--- a/paper/figures/spr-flow/spr-flow.pptx
+++ b/paper/figures/spr-flow/spr-flow.pptx
@@ -243,7 +243,7 @@
           <a:p>
             <a:fld id="{1E473C90-A72B-4F1B-9295-914E7F0D45C0}" type="datetimeFigureOut">
               <a:rPr lang="en-US" smtClean="0"/>
-              <a:t>8/25/2026</a:t>
+              <a:t>9/23/2026</a:t>
             </a:fld>
             <a:endParaRPr lang="en-US"/>
           </a:p>
@@ -413,7 +413,7 @@
           <a:p>
             <a:fld id="{1E473C90-A72B-4F1B-9295-914E7F0D45C0}" type="datetimeFigureOut">
               <a:rPr lang="en-US" smtClean="0"/>
-              <a:t>8/25/2026</a:t>
+              <a:t>9/23/2026</a:t>
             </a:fld>
             <a:endParaRPr lang="en-US"/>
           </a:p>
@@ -593,7 +593,7 @@
           <a:p>
             <a:fld id="{1E473C90-A72B-4F1B-9295-914E7F0D45C0}" type="datetimeFigureOut">
               <a:rPr lang="en-US" smtClean="0"/>
-              <a:t>8/25/2026</a:t>
+              <a:t>9/23/2026</a:t>
             </a:fld>
             <a:endParaRPr lang="en-US"/>
           </a:p>
@@ -763,7 +763,7 @@
           <a:p>
             <a:fld id="{1E473C90-A72B-4F1B-9295-914E7F0D45C0}" type="datetimeFigureOut">
               <a:rPr lang="en-US" smtClean="0"/>
-              <a:t>8/25/2026</a:t>
+              <a:t>9/23/2026</a:t>
             </a:fld>
             <a:endParaRPr lang="en-US"/>
           </a:p>
@@ -1009,7 +1009,7 @@
           <a:p>
             <a:fld id="{1E473C90-A72B-4F1B-9295-914E7F0D45C0}" type="datetimeFigureOut">
               <a:rPr lang="en-US" smtClean="0"/>
-              <a:t>8/25/2026</a:t>
+              <a:t>9/23/2026</a:t>
             </a:fld>
             <a:endParaRPr lang="en-US"/>
           </a:p>
@@ -1241,7 +1241,7 @@
           <a:p>
             <a:fld id="{1E473C90-A72B-4F1B-9295-914E7F0D45C0}" type="datetimeFigureOut">
               <a:rPr lang="en-US" smtClean="0"/>
-              <a:t>8/25/2026</a:t>
+              <a:t>9/23/2026</a:t>
             </a:fld>
             <a:endParaRPr lang="en-US"/>
           </a:p>
@@ -1608,7 +1608,7 @@
           <a:p>
             <a:fld id="{1E473C90-A72B-4F1B-9295-914E7F0D45C0}" type="datetimeFigureOut">
               <a:rPr lang="en-US" smtClean="0"/>
-              <a:t>8/25/2026</a:t>
+              <a:t>9/23/2026</a:t>
             </a:fld>
             <a:endParaRPr lang="en-US"/>
           </a:p>
@@ -1726,7 +1726,7 @@
           <a:p>
             <a:fld id="{1E473C90-A72B-4F1B-9295-914E7F0D45C0}" type="datetimeFigureOut">
               <a:rPr lang="en-US" smtClean="0"/>
-              <a:t>8/25/2026</a:t>
+              <a:t>9/23/2026</a:t>
             </a:fld>
             <a:endParaRPr lang="en-US"/>
           </a:p>
@@ -1821,7 +1821,7 @@
           <a:p>
             <a:fld id="{1E473C90-A72B-4F1B-9295-914E7F0D45C0}" type="datetimeFigureOut">
               <a:rPr lang="en-US" smtClean="0"/>
-              <a:t>8/25/2026</a:t>
+              <a:t>9/23/2026</a:t>
             </a:fld>
             <a:endParaRPr lang="en-US"/>
           </a:p>
@@ -2098,7 +2098,7 @@
           <a:p>
             <a:fld id="{1E473C90-A72B-4F1B-9295-914E7F0D45C0}" type="datetimeFigureOut">
               <a:rPr lang="en-US" smtClean="0"/>
-              <a:t>8/25/2026</a:t>
+              <a:t>9/23/2026</a:t>
             </a:fld>
             <a:endParaRPr lang="en-US"/>
           </a:p>
@@ -2355,7 +2355,7 @@
           <a:p>
             <a:fld id="{1E473C90-A72B-4F1B-9295-914E7F0D45C0}" type="datetimeFigureOut">
               <a:rPr lang="en-US" smtClean="0"/>
-              <a:t>8/25/2026</a:t>
+              <a:t>9/23/2026</a:t>
             </a:fld>
             <a:endParaRPr lang="en-US"/>
           </a:p>
@@ -2568,7 +2568,7 @@
           <a:p>
             <a:fld id="{1E473C90-A72B-4F1B-9295-914E7F0D45C0}" type="datetimeFigureOut">
               <a:rPr lang="en-US" smtClean="0"/>
-              <a:t>8/25/2026</a:t>
+              <a:t>9/23/2026</a:t>
             </a:fld>
             <a:endParaRPr lang="en-US"/>
           </a:p>
@@ -3757,12 +3757,17 @@
           <a:p>
             <a:pPr algn="ctr"/>
             <a:r>
-              <a:rPr lang="en-US" sz="1200" dirty="0">
+              <a:rPr lang="en-US" sz="900">
                 <a:latin typeface="Arial" panose="020B0604020202020204" pitchFamily="34" charset="0"/>
                 <a:cs typeface="Arial" panose="020B0604020202020204" pitchFamily="34" charset="0"/>
               </a:rPr>
-              <a:t>Target is reachable today?</a:t>
-            </a:r>
+              <a:t>Reachable with
+enough dates left?</a:t>
+            </a:r>
+            <a:endParaRPr lang="en-US" sz="900" dirty="0">
+              <a:latin typeface="Arial" panose="020B0604020202020204" pitchFamily="34" charset="0"/>
+              <a:cs typeface="Arial" panose="020B0604020202020204" pitchFamily="34" charset="0"/>
+            </a:endParaRPr>
           </a:p>
         </p:txBody>
       </p:sp>
@@ -3820,12 +3825,17 @@
           <a:p>
             <a:pPr algn="ctr"/>
             <a:r>
-              <a:rPr lang="en-US" sz="1200" dirty="0">
+              <a:rPr lang="en-US" sz="1000">
                 <a:latin typeface="Arial" panose="020B0604020202020204" pitchFamily="34" charset="0"/>
                 <a:cs typeface="Arial" panose="020B0604020202020204" pitchFamily="34" charset="0"/>
               </a:rPr>
-              <a:t>Target needed and frequency gate open?</a:t>
-            </a:r>
+              <a:t>Needed, enough dates
+left, and gate open?</a:t>
+            </a:r>
+            <a:endParaRPr lang="en-US" sz="1000" dirty="0">
+              <a:latin typeface="Arial" panose="020B0604020202020204" pitchFamily="34" charset="0"/>
+              <a:cs typeface="Arial" panose="020B0604020202020204" pitchFamily="34" charset="0"/>
+            </a:endParaRPr>
           </a:p>
         </p:txBody>
       </p:sp>
